--- a/content/decks/media-studies/media-studies-s1-lesson-17-consolidation-and-the-coverage-matrix.pptx
+++ b/content/decks/media-studies/media-studies-s1-lesson-17-consolidation-and-the-coverage-matrix.pptx
@@ -15,9 +15,10 @@
     <p:sldId id="263" r:id="rId9"/>
     <p:sldId id="264" r:id="rId10"/>
     <p:sldId id="265" r:id="rId11"/>
+    <p:sldId id="266" r:id="rId12"/>
   </p:sldIdLst>
   <p:notesMasterIdLst>
-    <p:notesMasterId r:id="rId12"/>
+    <p:notesMasterId r:id="rId13"/>
   </p:notesMasterIdLst>
   <p:sldSz cx="12192000" cy="6858000"/>
   <p:notesSz cx="6858000" cy="12192000"/>
@@ -511,7 +512,7 @@
           <a:p>
             <a:r>
               <a:rPr lang="en-US" dirty="0"/>
-              <a:t>The semester's knowledge gets audited before the exam tests it. Every case study crossed against the four Key Concepts until the uncovered cell is found.</a:t>
+              <a:t>The semester's knowledge gets audited before the exam tests it. Every case study crossed against the four Key Concepts until the uncovered cell is found. Calendar note: Tue 12-22 is listed as End-of-Semester Activity on the school calendar and is unresolved; if it claims the day, D2's trios fold into Wednesday.</a:t>
             </a:r>
             <a:endParaRPr lang="en-US" dirty="0"/>
           </a:p>
@@ -599,7 +600,7 @@
           <a:p>
             <a:r>
               <a:rPr lang="en-US" dirty="0"/>
-              <a:t/>
+              <a:t>Only the revision-card deck and the case-study document travel home; nothing else does. The cover on screen is June 2024 P2/21, the paper the room has already worked with. WS 5.3 is the model of what a page contains, not a sheet to fill.</a:t>
             </a:r>
             <a:endParaRPr lang="en-US" dirty="0"/>
           </a:p>
@@ -623,6 +624,94 @@
             <a:fld id="{F7021451-1387-4CA6-816F-3879F97B5CBC}" type="slidenum">
               <a:rPr lang="en-US"/>
               <a:t>10</a:t>
+            </a:fld>
+            <a:endParaRPr lang="en-US"/>
+          </a:p>
+        </p:txBody>
+      </p:sp>
+    </p:spTree>
+    <p:extLst>
+      <p:ext uri="{BB962C8B-B14F-4D97-AF65-F5344CB8AC3E}">
+        <p14:creationId xmlns:p14="http://schemas.microsoft.com/office/powerpoint/2010/main" val="1024086991"/>
+      </p:ext>
+    </p:extLst>
+  </p:cSld>
+  <p:clrMapOvr>
+    <a:masterClrMapping/>
+  </p:clrMapOvr>
+</p:notes>
+</file>
+
+<file path=ppt/notesSlides/notesSlide11.xml><?xml version="1.0" encoding="utf-8"?>
+<p:notes xmlns:a="http://schemas.openxmlformats.org/drawingml/2006/main" xmlns:r="http://schemas.openxmlformats.org/officeDocument/2006/relationships" xmlns:p="http://schemas.openxmlformats.org/presentationml/2006/main">
+  <p:cSld>
+    <p:spTree>
+      <p:nvGrpSpPr>
+        <p:cNvPr id="1" name=""/>
+        <p:cNvGrpSpPr/>
+        <p:nvPr/>
+      </p:nvGrpSpPr>
+      <p:grpSpPr>
+        <a:xfrm>
+          <a:off x="0" y="0"/>
+          <a:ext cx="0" cy="0"/>
+          <a:chOff x="0" y="0"/>
+          <a:chExt cx="0" cy="0"/>
+        </a:xfrm>
+      </p:grpSpPr>
+      <p:sp>
+        <p:nvSpPr>
+          <p:cNvPr id="2" name="Slide Image Placeholder 1"/>
+          <p:cNvSpPr>
+            <a:spLocks noGrp="1" noRot="1" noChangeAspect="1"/>
+          </p:cNvSpPr>
+          <p:nvPr>
+            <p:ph type="sldImg"/>
+          </p:nvPr>
+        </p:nvSpPr>
+        <p:spPr/>
+      </p:sp>
+      <p:sp>
+        <p:nvSpPr>
+          <p:cNvPr id="3" name="Notes Placeholder 2"/>
+          <p:cNvSpPr>
+            <a:spLocks noGrp="1"/>
+          </p:cNvSpPr>
+          <p:nvPr>
+            <p:ph type="body" idx="1"/>
+          </p:nvPr>
+        </p:nvSpPr>
+        <p:spPr/>
+        <p:txBody>
+          <a:bodyPr/>
+          <a:lstStyle/>
+          <a:p>
+            <a:r>
+              <a:rPr lang="en-US" dirty="0"/>
+              <a:t/>
+            </a:r>
+            <a:endParaRPr lang="en-US" dirty="0"/>
+          </a:p>
+        </p:txBody>
+      </p:sp>
+      <p:sp>
+        <p:nvSpPr>
+          <p:cNvPr id="4" name="Slide Number Placeholder 3"/>
+          <p:cNvSpPr>
+            <a:spLocks noGrp="1"/>
+          </p:cNvSpPr>
+          <p:nvPr>
+            <p:ph type="sldNum" sz="quarter" idx="10"/>
+          </p:nvPr>
+        </p:nvSpPr>
+        <p:spPr/>
+        <p:txBody>
+          <a:bodyPr/>
+          <a:lstStyle/>
+          <a:p>
+            <a:fld id="{F7021451-1387-4CA6-816F-3879F97B5CBC}" type="slidenum">
+              <a:rPr lang="en-US"/>
+              <a:t>11</a:t>
             </a:fld>
             <a:endParaRPr lang="en-US"/>
           </a:p>
@@ -775,7 +864,7 @@
           <a:p>
             <a:r>
               <a:rPr lang="en-US" dirty="0"/>
-              <a:t/>
+              <a:t>The grid on screen is the real June 2024 page: Media Concepts, Contexts and Critical Debates, Use of Terminology, Analysis, Use of Examples, five marks each. Band each criterion before the mark is revealed; the gap is the conversation.</a:t>
             </a:r>
             <a:endParaRPr lang="en-US" dirty="0"/>
           </a:p>
@@ -863,7 +952,7 @@
           <a:p>
             <a:r>
               <a:rPr lang="en-US" dirty="0"/>
-              <a:t/>
+              <a:t>Argue it aloud in trios, one countering from the same case study; the talk is the drafting. Plans that survived a counter do not go stale. The menu on screen is the real June 2024 pair: ownership and content, or active audiences; every trio question keeps that register.</a:t>
             </a:r>
             <a:endParaRPr lang="en-US" dirty="0"/>
           </a:p>
@@ -1039,7 +1128,7 @@
           <a:p>
             <a:r>
               <a:rPr lang="en-US" dirty="0"/>
-              <a:t>The moon atlas sets the standard for coverage. The empty cell is the point of the exercise, so find it without flinching.</a:t>
+              <a:t>Kept as the governing metaphor, one sentence and out. The matrix, not the moon, is the instrument; the next slide does the work.</a:t>
             </a:r>
             <a:endParaRPr lang="en-US" dirty="0"/>
           </a:p>
@@ -1127,7 +1216,7 @@
           <a:p>
             <a:r>
               <a:rPr lang="en-US" dirty="0"/>
-              <a:t/>
+              <a:t>Jeopardy procedure: claim, verify, score evidenced, thin, or empty. The room should see the teacher score a cell empty without ceremony; the audit only works if empty is a normal answer.</a:t>
             </a:r>
             <a:endParaRPr lang="en-US" dirty="0"/>
           </a:p>
@@ -1215,7 +1304,7 @@
           <a:p>
             <a:r>
               <a:rPr lang="en-US" dirty="0"/>
-              <a:t/>
+              <a:t>A statement, not a quotation: the week's whole deliverable in one line. The named cell feeds HW2's essay plan directly.</a:t>
             </a:r>
             <a:endParaRPr lang="en-US" dirty="0"/>
           </a:p>
@@ -1303,7 +1392,7 @@
           <a:p>
             <a:r>
               <a:rPr lang="en-US" dirty="0"/>
-              <a:t/>
+              <a:t>Announcement wording matters: the window opens Mon 11 Jan and today clears the notice rule (the register's standing is one week; the old 14-day wording is superseded). HW2 sizing said aloud: three to four hours across the whole break, not a holiday of revision.</a:t>
             </a:r>
             <a:endParaRPr lang="en-US" dirty="0"/>
           </a:p>
@@ -1931,6 +2020,630 @@
     <p:bg>
       <p:bgPr>
         <a:solidFill>
+          <a:srgbClr val="FAF8F1"/>
+        </a:solidFill>
+      </p:bgPr>
+    </p:bg>
+    <p:spTree>
+      <p:nvGrpSpPr>
+        <p:cNvPr id="1" name=""/>
+        <p:cNvGrpSpPr/>
+        <p:nvPr/>
+      </p:nvGrpSpPr>
+      <p:grpSpPr>
+        <a:xfrm>
+          <a:off x="0" y="0"/>
+          <a:ext cx="0" cy="0"/>
+          <a:chOff x="0" y="0"/>
+          <a:chExt cx="0" cy="0"/>
+        </a:xfrm>
+      </p:grpSpPr>
+      <p:sp>
+        <p:nvSpPr>
+          <p:cNvPr id="2" name="Text 0"/>
+          <p:cNvSpPr/>
+          <p:nvPr/>
+        </p:nvSpPr>
+        <p:spPr>
+          <a:xfrm>
+            <a:off x="822960" y="457200"/>
+            <a:ext cx="6400800" cy="274320"/>
+          </a:xfrm>
+          <a:prstGeom prst="rect">
+            <a:avLst/>
+          </a:prstGeom>
+          <a:noFill/>
+          <a:ln/>
+        </p:spPr>
+        <p:txBody>
+          <a:bodyPr wrap="square" lIns="0" tIns="0" rIns="0" bIns="0" rtlCol="0" anchor="ctr"/>
+          <a:lstStyle/>
+          <a:p>
+            <a:pPr algn="l" indent="0" marL="0">
+              <a:buNone/>
+            </a:pPr>
+            <a:r>
+              <a:rPr lang="en-US" sz="1100" b="1" spc="250" kern="0" dirty="0">
+                <a:solidFill>
+                  <a:srgbClr val="4A6B5D"/>
+                </a:solidFill>
+                <a:latin typeface="Arial" pitchFamily="34" charset="0"/>
+                <a:ea typeface="Arial" pitchFamily="34" charset="-122"/>
+                <a:cs typeface="Arial" pitchFamily="34" charset="-120"/>
+              </a:rPr>
+              <a:t>WHAT TRAVELS HOME</a:t>
+            </a:r>
+            <a:endParaRPr lang="en-US" sz="1100" dirty="0"/>
+          </a:p>
+        </p:txBody>
+      </p:sp>
+      <p:sp>
+        <p:nvSpPr>
+          <p:cNvPr id="3" name="Text 1"/>
+          <p:cNvSpPr/>
+          <p:nvPr/>
+        </p:nvSpPr>
+        <p:spPr>
+          <a:xfrm>
+            <a:off x="6793992" y="457200"/>
+            <a:ext cx="4572000" cy="274320"/>
+          </a:xfrm>
+          <a:prstGeom prst="rect">
+            <a:avLst/>
+          </a:prstGeom>
+          <a:noFill/>
+          <a:ln/>
+        </p:spPr>
+        <p:txBody>
+          <a:bodyPr wrap="square" lIns="0" tIns="0" rIns="0" bIns="0" rtlCol="0" anchor="ctr"/>
+          <a:lstStyle/>
+          <a:p>
+            <a:pPr algn="r" indent="0" marL="0">
+              <a:buNone/>
+            </a:pPr>
+            <a:r>
+              <a:rPr lang="en-US" sz="1100" b="1" spc="250" kern="0" dirty="0">
+                <a:solidFill>
+                  <a:srgbClr val="7A7F72"/>
+                </a:solidFill>
+                <a:latin typeface="Arial" pitchFamily="34" charset="0"/>
+                <a:ea typeface="Arial" pitchFamily="34" charset="-122"/>
+                <a:cs typeface="Arial" pitchFamily="34" charset="-120"/>
+              </a:rPr>
+              <a:t>THE REVISION SPINE, IN DOCUMENTS</a:t>
+            </a:r>
+            <a:endParaRPr lang="en-US" sz="1100" dirty="0"/>
+          </a:p>
+        </p:txBody>
+      </p:sp>
+      <p:sp>
+        <p:nvSpPr>
+          <p:cNvPr id="4" name="Shape 2"/>
+          <p:cNvSpPr/>
+          <p:nvPr/>
+        </p:nvSpPr>
+        <p:spPr>
+          <a:xfrm>
+            <a:off x="822960" y="786384"/>
+            <a:ext cx="10543032" cy="0"/>
+          </a:xfrm>
+          <a:prstGeom prst="line">
+            <a:avLst/>
+          </a:prstGeom>
+          <a:noFill/>
+          <a:ln w="9525">
+            <a:solidFill>
+              <a:srgbClr val="D9D4C4"/>
+            </a:solidFill>
+            <a:prstDash val="solid"/>
+          </a:ln>
+        </p:spPr>
+      </p:sp>
+      <p:sp>
+        <p:nvSpPr>
+          <p:cNvPr id="5" name="Shape 3"/>
+          <p:cNvSpPr/>
+          <p:nvPr/>
+        </p:nvSpPr>
+        <p:spPr>
+          <a:xfrm>
+            <a:off x="822960" y="1143000"/>
+            <a:ext cx="3270504" cy="3977640"/>
+          </a:xfrm>
+          <a:prstGeom prst="rect">
+            <a:avLst/>
+          </a:prstGeom>
+          <a:solidFill>
+            <a:srgbClr val="FAF8F1"/>
+          </a:solidFill>
+          <a:ln w="9525">
+            <a:solidFill>
+              <a:srgbClr val="D9D4C4"/>
+            </a:solidFill>
+            <a:prstDash val="solid"/>
+          </a:ln>
+        </p:spPr>
+      </p:sp>
+      <p:pic>
+        <p:nvPicPr>
+          <p:cNvPr id="6" name="Image 0" descr="/Users/dogan/Documents/Vaults/Courses/wiki/classes/media-studies/decks/_build/img/ws21.jpg">    </p:cNvPr>
+          <p:cNvPicPr>
+            <a:picLocks noChangeAspect="1"/>
+          </p:cNvPicPr>
+          <p:nvPr/>
+        </p:nvPicPr>
+        <p:blipFill>
+          <a:blip r:embed="rId1"/>
+          <a:stretch>
+            <a:fillRect/>
+          </a:stretch>
+        </p:blipFill>
+        <p:spPr>
+          <a:xfrm>
+            <a:off x="950976" y="2066638"/>
+            <a:ext cx="3014472" cy="2130364"/>
+          </a:xfrm>
+          <a:prstGeom prst="rect">
+            <a:avLst/>
+          </a:prstGeom>
+        </p:spPr>
+      </p:pic>
+      <p:sp>
+        <p:nvSpPr>
+          <p:cNvPr id="7" name="Text 4"/>
+          <p:cNvSpPr/>
+          <p:nvPr/>
+        </p:nvSpPr>
+        <p:spPr>
+          <a:xfrm>
+            <a:off x="822960" y="5193792"/>
+            <a:ext cx="3270504" cy="320040"/>
+          </a:xfrm>
+          <a:prstGeom prst="rect">
+            <a:avLst/>
+          </a:prstGeom>
+          <a:noFill/>
+          <a:ln/>
+        </p:spPr>
+        <p:txBody>
+          <a:bodyPr wrap="square" lIns="0" tIns="0" rIns="0" bIns="0" rtlCol="0" anchor="ctr"/>
+          <a:lstStyle/>
+          <a:p>
+            <a:pPr algn="ctr" indent="0" marL="0">
+              <a:buNone/>
+            </a:pPr>
+            <a:r>
+              <a:rPr lang="en-US" sz="1500" dirty="0">
+                <a:solidFill>
+                  <a:srgbClr val="4A6B5D"/>
+                </a:solidFill>
+                <a:latin typeface="Georgia" pitchFamily="34" charset="0"/>
+                <a:ea typeface="Georgia" pitchFamily="34" charset="-122"/>
+                <a:cs typeface="Georgia" pitchFamily="34" charset="-120"/>
+              </a:rPr>
+              <a:t>The theory-card deck</a:t>
+            </a:r>
+            <a:endParaRPr lang="en-US" sz="1500" dirty="0"/>
+          </a:p>
+        </p:txBody>
+      </p:sp>
+      <p:sp>
+        <p:nvSpPr>
+          <p:cNvPr id="8" name="Text 5"/>
+          <p:cNvSpPr/>
+          <p:nvPr/>
+        </p:nvSpPr>
+        <p:spPr>
+          <a:xfrm>
+            <a:off x="822960" y="5504688"/>
+            <a:ext cx="3270504" cy="566928"/>
+          </a:xfrm>
+          <a:prstGeom prst="rect">
+            <a:avLst/>
+          </a:prstGeom>
+          <a:noFill/>
+          <a:ln/>
+        </p:spPr>
+        <p:txBody>
+          <a:bodyPr wrap="square" lIns="0" tIns="0" rIns="0" bIns="0" rtlCol="0" anchor="t"/>
+          <a:lstStyle/>
+          <a:p>
+            <a:pPr algn="ctr" indent="0" marL="0">
+              <a:lnSpc>
+                <a:spcPts val="1400"/>
+              </a:lnSpc>
+              <a:buNone/>
+            </a:pPr>
+            <a:r>
+              <a:rPr lang="en-US" sz="1050" dirty="0">
+                <a:solidFill>
+                  <a:srgbClr val="7A7F72"/>
+                </a:solidFill>
+                <a:latin typeface="Arial" pitchFamily="34" charset="0"/>
+                <a:ea typeface="Arial" pitchFamily="34" charset="-122"/>
+                <a:cs typeface="Arial" pitchFamily="34" charset="-120"/>
+              </a:rPr>
+              <a:t>WS 2.1, built since Lesson 02: the consolidation spine, due back full</a:t>
+            </a:r>
+            <a:endParaRPr lang="en-US" sz="1050" dirty="0"/>
+          </a:p>
+        </p:txBody>
+      </p:sp>
+      <p:sp>
+        <p:nvSpPr>
+          <p:cNvPr id="9" name="Shape 6"/>
+          <p:cNvSpPr/>
+          <p:nvPr/>
+        </p:nvSpPr>
+        <p:spPr>
+          <a:xfrm>
+            <a:off x="4459224" y="1143000"/>
+            <a:ext cx="3270504" cy="3977640"/>
+          </a:xfrm>
+          <a:prstGeom prst="rect">
+            <a:avLst/>
+          </a:prstGeom>
+          <a:solidFill>
+            <a:srgbClr val="FAF8F1"/>
+          </a:solidFill>
+          <a:ln w="9525">
+            <a:solidFill>
+              <a:srgbClr val="D9D4C4"/>
+            </a:solidFill>
+            <a:prstDash val="solid"/>
+          </a:ln>
+        </p:spPr>
+      </p:sp>
+      <p:pic>
+        <p:nvPicPr>
+          <p:cNvPr id="10" name="Image 1" descr="/Users/dogan/Documents/Vaults/Courses/wiki/classes/media-studies/decks/_build/img/ws53.jpg">    </p:cNvPr>
+          <p:cNvPicPr>
+            <a:picLocks noChangeAspect="1"/>
+          </p:cNvPicPr>
+          <p:nvPr/>
+        </p:nvPicPr>
+        <p:blipFill>
+          <a:blip r:embed="rId2"/>
+          <a:stretch>
+            <a:fillRect/>
+          </a:stretch>
+        </p:blipFill>
+        <p:spPr>
+          <a:xfrm>
+            <a:off x="4587240" y="2066638"/>
+            <a:ext cx="3014472" cy="2130364"/>
+          </a:xfrm>
+          <a:prstGeom prst="rect">
+            <a:avLst/>
+          </a:prstGeom>
+        </p:spPr>
+      </p:pic>
+      <p:sp>
+        <p:nvSpPr>
+          <p:cNvPr id="11" name="Text 7"/>
+          <p:cNvSpPr/>
+          <p:nvPr/>
+        </p:nvSpPr>
+        <p:spPr>
+          <a:xfrm>
+            <a:off x="4459224" y="5193792"/>
+            <a:ext cx="3270504" cy="320040"/>
+          </a:xfrm>
+          <a:prstGeom prst="rect">
+            <a:avLst/>
+          </a:prstGeom>
+          <a:noFill/>
+          <a:ln/>
+        </p:spPr>
+        <p:txBody>
+          <a:bodyPr wrap="square" lIns="0" tIns="0" rIns="0" bIns="0" rtlCol="0" anchor="ctr"/>
+          <a:lstStyle/>
+          <a:p>
+            <a:pPr algn="ctr" indent="0" marL="0">
+              <a:buNone/>
+            </a:pPr>
+            <a:r>
+              <a:rPr lang="en-US" sz="1500" dirty="0">
+                <a:solidFill>
+                  <a:srgbClr val="4A6B5D"/>
+                </a:solidFill>
+                <a:latin typeface="Georgia" pitchFamily="34" charset="0"/>
+                <a:ea typeface="Georgia" pitchFamily="34" charset="-122"/>
+                <a:cs typeface="Georgia" pitchFamily="34" charset="-120"/>
+              </a:rPr>
+              <a:t>The model page</a:t>
+            </a:r>
+            <a:endParaRPr lang="en-US" sz="1500" dirty="0"/>
+          </a:p>
+        </p:txBody>
+      </p:sp>
+      <p:sp>
+        <p:nvSpPr>
+          <p:cNvPr id="12" name="Text 8"/>
+          <p:cNvSpPr/>
+          <p:nvPr/>
+        </p:nvSpPr>
+        <p:spPr>
+          <a:xfrm>
+            <a:off x="4459224" y="5504688"/>
+            <a:ext cx="3270504" cy="566928"/>
+          </a:xfrm>
+          <a:prstGeom prst="rect">
+            <a:avLst/>
+          </a:prstGeom>
+          <a:noFill/>
+          <a:ln/>
+        </p:spPr>
+        <p:txBody>
+          <a:bodyPr wrap="square" lIns="0" tIns="0" rIns="0" bIns="0" rtlCol="0" anchor="t"/>
+          <a:lstStyle/>
+          <a:p>
+            <a:pPr algn="ctr" indent="0" marL="0">
+              <a:lnSpc>
+                <a:spcPts val="1400"/>
+              </a:lnSpc>
+              <a:buNone/>
+            </a:pPr>
+            <a:r>
+              <a:rPr lang="en-US" sz="1050" dirty="0">
+                <a:solidFill>
+                  <a:srgbClr val="7A7F72"/>
+                </a:solidFill>
+                <a:latin typeface="Arial" pitchFamily="34" charset="0"/>
+                <a:ea typeface="Arial" pitchFamily="34" charset="-122"/>
+                <a:cs typeface="Arial" pitchFamily="34" charset="-120"/>
+              </a:rPr>
+              <a:t>WS 5.3, the National Geographic sheet: what one revision page contains</a:t>
+            </a:r>
+            <a:endParaRPr lang="en-US" sz="1050" dirty="0"/>
+          </a:p>
+        </p:txBody>
+      </p:sp>
+      <p:sp>
+        <p:nvSpPr>
+          <p:cNvPr id="13" name="Shape 9"/>
+          <p:cNvSpPr/>
+          <p:nvPr/>
+        </p:nvSpPr>
+        <p:spPr>
+          <a:xfrm>
+            <a:off x="8095488" y="1143000"/>
+            <a:ext cx="3270504" cy="3977640"/>
+          </a:xfrm>
+          <a:prstGeom prst="rect">
+            <a:avLst/>
+          </a:prstGeom>
+          <a:solidFill>
+            <a:srgbClr val="FAF8F1"/>
+          </a:solidFill>
+          <a:ln w="9525">
+            <a:solidFill>
+              <a:srgbClr val="D9D4C4"/>
+            </a:solidFill>
+            <a:prstDash val="solid"/>
+          </a:ln>
+        </p:spPr>
+      </p:sp>
+      <p:pic>
+        <p:nvPicPr>
+          <p:cNvPr id="14" name="Image 2" descr="/Users/dogan/Documents/Vaults/Courses/wiki/classes/media-studies/decks/_build/img/qp21-cover.jpg">    </p:cNvPr>
+          <p:cNvPicPr>
+            <a:picLocks noChangeAspect="1"/>
+          </p:cNvPicPr>
+          <p:nvPr/>
+        </p:nvPicPr>
+        <p:blipFill>
+          <a:blip r:embed="rId3"/>
+          <a:stretch>
+            <a:fillRect/>
+          </a:stretch>
+        </p:blipFill>
+        <p:spPr>
+          <a:xfrm>
+            <a:off x="8414891" y="1271016"/>
+            <a:ext cx="2631697" cy="3721608"/>
+          </a:xfrm>
+          <a:prstGeom prst="rect">
+            <a:avLst/>
+          </a:prstGeom>
+        </p:spPr>
+      </p:pic>
+      <p:sp>
+        <p:nvSpPr>
+          <p:cNvPr id="15" name="Text 10"/>
+          <p:cNvSpPr/>
+          <p:nvPr/>
+        </p:nvSpPr>
+        <p:spPr>
+          <a:xfrm>
+            <a:off x="8095488" y="5193792"/>
+            <a:ext cx="3270504" cy="320040"/>
+          </a:xfrm>
+          <a:prstGeom prst="rect">
+            <a:avLst/>
+          </a:prstGeom>
+          <a:noFill/>
+          <a:ln/>
+        </p:spPr>
+        <p:txBody>
+          <a:bodyPr wrap="square" lIns="0" tIns="0" rIns="0" bIns="0" rtlCol="0" anchor="ctr"/>
+          <a:lstStyle/>
+          <a:p>
+            <a:pPr algn="ctr" indent="0" marL="0">
+              <a:buNone/>
+            </a:pPr>
+            <a:r>
+              <a:rPr lang="en-US" sz="1500" dirty="0">
+                <a:solidFill>
+                  <a:srgbClr val="4A6B5D"/>
+                </a:solidFill>
+                <a:latin typeface="Georgia" pitchFamily="34" charset="0"/>
+                <a:ea typeface="Georgia" pitchFamily="34" charset="-122"/>
+                <a:cs typeface="Georgia" pitchFamily="34" charset="-120"/>
+              </a:rPr>
+              <a:t>The paper it feeds</a:t>
+            </a:r>
+            <a:endParaRPr lang="en-US" sz="1500" dirty="0"/>
+          </a:p>
+        </p:txBody>
+      </p:sp>
+      <p:sp>
+        <p:nvSpPr>
+          <p:cNvPr id="16" name="Text 11"/>
+          <p:cNvSpPr/>
+          <p:nvPr/>
+        </p:nvSpPr>
+        <p:spPr>
+          <a:xfrm>
+            <a:off x="8095488" y="5504688"/>
+            <a:ext cx="3270504" cy="566928"/>
+          </a:xfrm>
+          <a:prstGeom prst="rect">
+            <a:avLst/>
+          </a:prstGeom>
+          <a:noFill/>
+          <a:ln/>
+        </p:spPr>
+        <p:txBody>
+          <a:bodyPr wrap="square" lIns="0" tIns="0" rIns="0" bIns="0" rtlCol="0" anchor="t"/>
+          <a:lstStyle/>
+          <a:p>
+            <a:pPr algn="ctr" indent="0" marL="0">
+              <a:lnSpc>
+                <a:spcPts val="1400"/>
+              </a:lnSpc>
+              <a:buNone/>
+            </a:pPr>
+            <a:r>
+              <a:rPr lang="en-US" sz="1050" dirty="0">
+                <a:solidFill>
+                  <a:srgbClr val="7A7F72"/>
+                </a:solidFill>
+                <a:latin typeface="Arial" pitchFamily="34" charset="0"/>
+                <a:ea typeface="Arial" pitchFamily="34" charset="-122"/>
+                <a:cs typeface="Arial" pitchFamily="34" charset="-120"/>
+              </a:rPr>
+              <a:t>June 2024 Paper 2 cover: two hours, two questions, fifty marks</a:t>
+            </a:r>
+            <a:endParaRPr lang="en-US" sz="1050" dirty="0"/>
+          </a:p>
+        </p:txBody>
+      </p:sp>
+      <p:sp>
+        <p:nvSpPr>
+          <p:cNvPr id="17" name="Shape 12"/>
+          <p:cNvSpPr/>
+          <p:nvPr/>
+        </p:nvSpPr>
+        <p:spPr>
+          <a:xfrm>
+            <a:off x="822960" y="6382512"/>
+            <a:ext cx="10543032" cy="0"/>
+          </a:xfrm>
+          <a:prstGeom prst="line">
+            <a:avLst/>
+          </a:prstGeom>
+          <a:noFill/>
+          <a:ln w="9525">
+            <a:solidFill>
+              <a:srgbClr val="D9D4C4"/>
+            </a:solidFill>
+            <a:prstDash val="solid"/>
+          </a:ln>
+        </p:spPr>
+      </p:sp>
+      <p:sp>
+        <p:nvSpPr>
+          <p:cNvPr id="18" name="Text 13"/>
+          <p:cNvSpPr/>
+          <p:nvPr/>
+        </p:nvSpPr>
+        <p:spPr>
+          <a:xfrm>
+            <a:off x="822960" y="6419088"/>
+            <a:ext cx="7315200" cy="274320"/>
+          </a:xfrm>
+          <a:prstGeom prst="rect">
+            <a:avLst/>
+          </a:prstGeom>
+          <a:noFill/>
+          <a:ln/>
+        </p:spPr>
+        <p:txBody>
+          <a:bodyPr wrap="square" lIns="0" tIns="0" rIns="0" bIns="0" rtlCol="0" anchor="ctr"/>
+          <a:lstStyle/>
+          <a:p>
+            <a:pPr indent="0" marL="0">
+              <a:buNone/>
+            </a:pPr>
+            <a:r>
+              <a:rPr lang="en-US" sz="900" spc="150" kern="0" dirty="0">
+                <a:solidFill>
+                  <a:srgbClr val="7A7F72"/>
+                </a:solidFill>
+                <a:latin typeface="Arial" pitchFamily="34" charset="0"/>
+                <a:ea typeface="Arial" pitchFamily="34" charset="-122"/>
+                <a:cs typeface="Arial" pitchFamily="34" charset="-120"/>
+              </a:rPr>
+              <a:t>MEDIA STUDIES 9607 · SEMESTER I</a:t>
+            </a:r>
+            <a:endParaRPr lang="en-US" sz="900" dirty="0"/>
+          </a:p>
+        </p:txBody>
+      </p:sp>
+      <p:sp>
+        <p:nvSpPr>
+          <p:cNvPr id="19" name="Text 14"/>
+          <p:cNvSpPr/>
+          <p:nvPr/>
+        </p:nvSpPr>
+        <p:spPr>
+          <a:xfrm>
+            <a:off x="10268712" y="6355080"/>
+            <a:ext cx="1097280" cy="365760"/>
+          </a:xfrm>
+          <a:prstGeom prst="rect">
+            <a:avLst/>
+          </a:prstGeom>
+          <a:noFill/>
+          <a:ln/>
+        </p:spPr>
+        <p:txBody>
+          <a:bodyPr wrap="square" lIns="0" tIns="0" rIns="0" bIns="0" rtlCol="0" anchor="ctr"/>
+          <a:lstStyle/>
+          <a:p>
+            <a:pPr algn="r" indent="0" marL="0">
+              <a:buNone/>
+            </a:pPr>
+            <a:r>
+              <a:rPr lang="en-US" sz="1600" dirty="0">
+                <a:solidFill>
+                  <a:srgbClr val="A3C1AD"/>
+                </a:solidFill>
+                <a:latin typeface="Georgia" pitchFamily="34" charset="0"/>
+                <a:ea typeface="Georgia" pitchFamily="34" charset="-122"/>
+                <a:cs typeface="Georgia" pitchFamily="34" charset="-120"/>
+              </a:rPr>
+              <a:t>05</a:t>
+            </a:r>
+            <a:endParaRPr lang="en-US" sz="1600" dirty="0"/>
+          </a:p>
+        </p:txBody>
+      </p:sp>
+    </p:spTree>
+  </p:cSld>
+  <p:clrMapOvr>
+    <a:masterClrMapping/>
+  </p:clrMapOvr>
+</p:sld>
+</file>
+
+<file path=ppt/slides/slide11.xml><?xml version="1.0" encoding="utf-8"?>
+<p:sld xmlns:a="http://schemas.openxmlformats.org/drawingml/2006/main" xmlns:r="http://schemas.openxmlformats.org/officeDocument/2006/relationships" xmlns:p="http://schemas.openxmlformats.org/presentationml/2006/main">
+  <p:cSld name="Slide 11">
+    <p:bg>
+      <p:bgPr>
+        <a:solidFill>
           <a:srgbClr val="4A6B5D"/>
         </a:solidFill>
       </p:bgPr>
@@ -2184,7 +2897,7 @@
                 <a:ea typeface="Georgia" pitchFamily="34" charset="-122"/>
                 <a:cs typeface="Georgia" pitchFamily="34" charset="-120"/>
               </a:rPr>
-              <a:t>05</a:t>
+              <a:t>06</a:t>
             </a:r>
             <a:endParaRPr lang="en-US" sz="1600" dirty="0"/>
           </a:p>
@@ -2526,8 +3239,8 @@
         </p:nvSpPr>
         <p:spPr>
           <a:xfrm>
-            <a:off x="822960" y="1005840"/>
-            <a:ext cx="10543032" cy="731520"/>
+            <a:off x="822960" y="960120"/>
+            <a:ext cx="5120640" cy="640080"/>
           </a:xfrm>
           <a:prstGeom prst="rect">
             <a:avLst/>
@@ -2543,7 +3256,7 @@
               <a:buNone/>
             </a:pPr>
             <a:r>
-              <a:rPr lang="en-US" sz="3800" dirty="0">
+              <a:rPr lang="en-US" sz="3400" dirty="0">
                 <a:solidFill>
                   <a:srgbClr val="24313F"/>
                 </a:solidFill>
@@ -2553,7 +3266,7 @@
               </a:rPr>
               <a:t>Self-band first</a:t>
             </a:r>
-            <a:endParaRPr lang="en-US" sz="3800" dirty="0"/>
+            <a:endParaRPr lang="en-US" sz="3400" dirty="0"/>
           </a:p>
         </p:txBody>
       </p:sp>
@@ -2565,8 +3278,8 @@
         </p:nvSpPr>
         <p:spPr>
           <a:xfrm>
-            <a:off x="822960" y="2011680"/>
-            <a:ext cx="4846320" cy="502920"/>
+            <a:off x="822960" y="1828800"/>
+            <a:ext cx="5029200" cy="457200"/>
           </a:xfrm>
           <a:prstGeom prst="rect">
             <a:avLst/>
@@ -2582,7 +3295,7 @@
               <a:buNone/>
             </a:pPr>
             <a:r>
-              <a:rPr lang="en-US" sz="2300" dirty="0">
+              <a:rPr lang="en-US" sz="2100" dirty="0">
                 <a:solidFill>
                   <a:srgbClr val="4A6B5D"/>
                 </a:solidFill>
@@ -2592,7 +3305,7 @@
               </a:rPr>
               <a:t>Band yourself first</a:t>
             </a:r>
-            <a:endParaRPr lang="en-US" sz="2300" dirty="0"/>
+            <a:endParaRPr lang="en-US" sz="2100" dirty="0"/>
           </a:p>
         </p:txBody>
       </p:sp>
@@ -2604,8 +3317,8 @@
         </p:nvSpPr>
         <p:spPr>
           <a:xfrm>
-            <a:off x="822960" y="2560320"/>
-            <a:ext cx="4754880" cy="0"/>
+            <a:off x="822960" y="2331720"/>
+            <a:ext cx="4937760" cy="0"/>
           </a:xfrm>
           <a:prstGeom prst="line">
             <a:avLst/>
@@ -2627,8 +3340,8 @@
         </p:nvSpPr>
         <p:spPr>
           <a:xfrm>
-            <a:off x="822960" y="2697480"/>
-            <a:ext cx="4846320" cy="2377440"/>
+            <a:off x="822960" y="2468880"/>
+            <a:ext cx="5029200" cy="1463040"/>
           </a:xfrm>
           <a:prstGeom prst="rect">
             <a:avLst/>
@@ -2642,12 +3355,12 @@
           <a:p>
             <a:pPr indent="0" marL="0">
               <a:lnSpc>
-                <a:spcPts val="2400"/>
+                <a:spcPts val="2100"/>
               </a:lnSpc>
               <a:buNone/>
             </a:pPr>
             <a:r>
-              <a:rPr lang="en-US" sz="1700" dirty="0">
+              <a:rPr lang="en-US" sz="1550" dirty="0">
                 <a:solidFill>
                   <a:srgbClr val="24313F"/>
                 </a:solidFill>
@@ -2657,7 +3370,7 @@
               </a:rPr>
               <a:t>Re-read your A4 script against the five criteria and band each one, before you see the mark. The gap between the two is the conversation.</a:t>
             </a:r>
-            <a:endParaRPr lang="en-US" sz="1700" dirty="0"/>
+            <a:endParaRPr lang="en-US" sz="1550" dirty="0"/>
           </a:p>
         </p:txBody>
       </p:sp>
@@ -2669,8 +3382,8 @@
         </p:nvSpPr>
         <p:spPr>
           <a:xfrm>
-            <a:off x="6309360" y="2011680"/>
-            <a:ext cx="4846320" cy="502920"/>
+            <a:off x="822960" y="3977640"/>
+            <a:ext cx="5029200" cy="457200"/>
           </a:xfrm>
           <a:prstGeom prst="rect">
             <a:avLst/>
@@ -2686,7 +3399,7 @@
               <a:buNone/>
             </a:pPr>
             <a:r>
-              <a:rPr lang="en-US" sz="2300" dirty="0">
+              <a:rPr lang="en-US" sz="2100" dirty="0">
                 <a:solidFill>
                   <a:srgbClr val="5C7A6B"/>
                 </a:solidFill>
@@ -2696,7 +3409,7 @@
               </a:rPr>
               <a:t>The target thread</a:t>
             </a:r>
-            <a:endParaRPr lang="en-US" sz="2300" dirty="0"/>
+            <a:endParaRPr lang="en-US" sz="2100" dirty="0"/>
           </a:p>
         </p:txBody>
       </p:sp>
@@ -2708,8 +3421,8 @@
         </p:nvSpPr>
         <p:spPr>
           <a:xfrm>
-            <a:off x="6309360" y="2560320"/>
-            <a:ext cx="4754880" cy="0"/>
+            <a:off x="822960" y="4480560"/>
+            <a:ext cx="4937760" cy="0"/>
           </a:xfrm>
           <a:prstGeom prst="line">
             <a:avLst/>
@@ -2731,8 +3444,8 @@
         </p:nvSpPr>
         <p:spPr>
           <a:xfrm>
-            <a:off x="6309360" y="2697480"/>
-            <a:ext cx="4846320" cy="2377440"/>
+            <a:off x="822960" y="4617720"/>
+            <a:ext cx="5029200" cy="1463040"/>
           </a:xfrm>
           <a:prstGeom prst="rect">
             <a:avLst/>
@@ -2746,12 +3459,12 @@
           <a:p>
             <a:pPr indent="0" marL="0">
               <a:lnSpc>
-                <a:spcPts val="2400"/>
+                <a:spcPts val="2100"/>
               </a:lnSpc>
               <a:buNone/>
             </a:pPr>
             <a:r>
-              <a:rPr lang="en-US" sz="1700" dirty="0">
+              <a:rPr lang="en-US" sz="1550" dirty="0">
                 <a:solidFill>
                   <a:srgbClr val="24313F"/>
                 </a:solidFill>
@@ -2759,9 +3472,9 @@
                 <a:ea typeface="Georgia" pitchFamily="34" charset="-122"/>
                 <a:cs typeface="Georgia" pitchFamily="34" charset="-120"/>
               </a:rPr>
-              <a:t>Log one target from the AO splits, connected in writing to the L11 target. Two data points now: the Forecast Grade has evidence.</a:t>
-            </a:r>
-            <a:endParaRPr lang="en-US" sz="1700" dirty="0"/>
+              <a:t>Log one target from the AO splits, connected in writing to the L14 target. Two data points now: the Forecast Grade has evidence.</a:t>
+            </a:r>
+            <a:endParaRPr lang="en-US" sz="1550" dirty="0"/>
           </a:p>
         </p:txBody>
       </p:sp>
@@ -2773,13 +3486,15 @@
         </p:nvSpPr>
         <p:spPr>
           <a:xfrm>
-            <a:off x="822960" y="6382512"/>
-            <a:ext cx="10543032" cy="0"/>
-          </a:xfrm>
-          <a:prstGeom prst="line">
-            <a:avLst/>
-          </a:prstGeom>
-          <a:noFill/>
+            <a:off x="6126480" y="1188720"/>
+            <a:ext cx="5257800" cy="4480560"/>
+          </a:xfrm>
+          <a:prstGeom prst="rect">
+            <a:avLst/>
+          </a:prstGeom>
+          <a:solidFill>
+            <a:srgbClr val="FAF8F1"/>
+          </a:solidFill>
           <a:ln w="9525">
             <a:solidFill>
               <a:srgbClr val="D9D4C4"/>
@@ -2788,32 +3503,56 @@
           </a:ln>
         </p:spPr>
       </p:sp>
-      <p:sp>
-        <p:nvSpPr>
-          <p:cNvPr id="13" name="Text 11"/>
-          <p:cNvSpPr/>
-          <p:nvPr/>
-        </p:nvSpPr>
-        <p:spPr>
-          <a:xfrm>
-            <a:off x="822960" y="6419088"/>
-            <a:ext cx="7315200" cy="274320"/>
-          </a:xfrm>
-          <a:prstGeom prst="rect">
-            <a:avLst/>
-          </a:prstGeom>
-          <a:noFill/>
-          <a:ln/>
-        </p:spPr>
-        <p:txBody>
-          <a:bodyPr wrap="square" lIns="0" tIns="0" rIns="0" bIns="0" rtlCol="0" anchor="ctr"/>
-          <a:lstStyle/>
-          <a:p>
-            <a:pPr indent="0" marL="0">
-              <a:buNone/>
-            </a:pPr>
-            <a:r>
-              <a:rPr lang="en-US" sz="900" spc="150" kern="0" dirty="0">
+      <p:pic>
+        <p:nvPicPr>
+          <p:cNvPr id="13" name="Image 0" descr="/Users/dogan/Documents/Vaults/Courses/wiki/classes/media-studies/decks/_build/img/ms21-p10.jpg">    </p:cNvPr>
+          <p:cNvPicPr>
+            <a:picLocks noChangeAspect="1"/>
+          </p:cNvPicPr>
+          <p:nvPr/>
+        </p:nvPicPr>
+        <p:blipFill>
+          <a:blip r:embed="rId1"/>
+          <a:stretch>
+            <a:fillRect/>
+          </a:stretch>
+        </p:blipFill>
+        <p:spPr>
+          <a:xfrm>
+            <a:off x="6254496" y="1660525"/>
+            <a:ext cx="5001768" cy="3536949"/>
+          </a:xfrm>
+          <a:prstGeom prst="rect">
+            <a:avLst/>
+          </a:prstGeom>
+        </p:spPr>
+      </p:pic>
+      <p:sp>
+        <p:nvSpPr>
+          <p:cNvPr id="14" name="Text 11"/>
+          <p:cNvSpPr/>
+          <p:nvPr/>
+        </p:nvSpPr>
+        <p:spPr>
+          <a:xfrm>
+            <a:off x="6126480" y="5715000"/>
+            <a:ext cx="5257800" cy="320040"/>
+          </a:xfrm>
+          <a:prstGeom prst="rect">
+            <a:avLst/>
+          </a:prstGeom>
+          <a:noFill/>
+          <a:ln/>
+        </p:spPr>
+        <p:txBody>
+          <a:bodyPr wrap="square" lIns="0" tIns="0" rIns="0" bIns="0" rtlCol="0" anchor="ctr"/>
+          <a:lstStyle/>
+          <a:p>
+            <a:pPr algn="ctr" indent="0" marL="0">
+              <a:buNone/>
+            </a:pPr>
+            <a:r>
+              <a:rPr lang="en-US" sz="1000" dirty="0">
                 <a:solidFill>
                   <a:srgbClr val="7A7F72"/>
                 </a:solidFill>
@@ -2821,6 +3560,68 @@
                 <a:ea typeface="Arial" pitchFamily="34" charset="-122"/>
                 <a:cs typeface="Arial" pitchFamily="34" charset="-120"/>
               </a:rPr>
+              <a:t>The instrument itself: June 2024 mark scheme, the five-criterion Section A grid</a:t>
+            </a:r>
+            <a:endParaRPr lang="en-US" sz="1000" dirty="0"/>
+          </a:p>
+        </p:txBody>
+      </p:sp>
+      <p:sp>
+        <p:nvSpPr>
+          <p:cNvPr id="15" name="Shape 12"/>
+          <p:cNvSpPr/>
+          <p:nvPr/>
+        </p:nvSpPr>
+        <p:spPr>
+          <a:xfrm>
+            <a:off x="822960" y="6382512"/>
+            <a:ext cx="10543032" cy="0"/>
+          </a:xfrm>
+          <a:prstGeom prst="line">
+            <a:avLst/>
+          </a:prstGeom>
+          <a:noFill/>
+          <a:ln w="9525">
+            <a:solidFill>
+              <a:srgbClr val="D9D4C4"/>
+            </a:solidFill>
+            <a:prstDash val="solid"/>
+          </a:ln>
+        </p:spPr>
+      </p:sp>
+      <p:sp>
+        <p:nvSpPr>
+          <p:cNvPr id="16" name="Text 13"/>
+          <p:cNvSpPr/>
+          <p:nvPr/>
+        </p:nvSpPr>
+        <p:spPr>
+          <a:xfrm>
+            <a:off x="822960" y="6419088"/>
+            <a:ext cx="7315200" cy="274320"/>
+          </a:xfrm>
+          <a:prstGeom prst="rect">
+            <a:avLst/>
+          </a:prstGeom>
+          <a:noFill/>
+          <a:ln/>
+        </p:spPr>
+        <p:txBody>
+          <a:bodyPr wrap="square" lIns="0" tIns="0" rIns="0" bIns="0" rtlCol="0" anchor="ctr"/>
+          <a:lstStyle/>
+          <a:p>
+            <a:pPr indent="0" marL="0">
+              <a:buNone/>
+            </a:pPr>
+            <a:r>
+              <a:rPr lang="en-US" sz="900" spc="150" kern="0" dirty="0">
+                <a:solidFill>
+                  <a:srgbClr val="7A7F72"/>
+                </a:solidFill>
+                <a:latin typeface="Arial" pitchFamily="34" charset="0"/>
+                <a:ea typeface="Arial" pitchFamily="34" charset="-122"/>
+                <a:cs typeface="Arial" pitchFamily="34" charset="-120"/>
+              </a:rPr>
               <a:t>MEDIA STUDIES 9607 · SEMESTER I</a:t>
             </a:r>
             <a:endParaRPr lang="en-US" sz="900" dirty="0"/>
@@ -2829,7 +3630,7 @@
       </p:sp>
       <p:sp>
         <p:nvSpPr>
-          <p:cNvPr id="14" name="Text 12"/>
+          <p:cNvPr id="17" name="Text 14"/>
           <p:cNvSpPr/>
           <p:nvPr/>
         </p:nvSpPr>
@@ -3007,8 +3808,8 @@
         </p:nvSpPr>
         <p:spPr>
           <a:xfrm>
-            <a:off x="822960" y="932688"/>
-            <a:ext cx="10543032" cy="640080"/>
+            <a:off x="822960" y="914400"/>
+            <a:ext cx="10543032" cy="548640"/>
           </a:xfrm>
           <a:prstGeom prst="rect">
             <a:avLst/>
@@ -3024,7 +3825,7 @@
               <a:buNone/>
             </a:pPr>
             <a:r>
-              <a:rPr lang="en-US" sz="3200" dirty="0">
+              <a:rPr lang="en-US" sz="3000" dirty="0">
                 <a:solidFill>
                   <a:srgbClr val="24313F"/>
                 </a:solidFill>
@@ -3034,7 +3835,7 @@
               </a:rPr>
               <a:t>Four moves</a:t>
             </a:r>
-            <a:endParaRPr lang="en-US" sz="3200" dirty="0"/>
+            <a:endParaRPr lang="en-US" sz="3000" dirty="0"/>
           </a:p>
         </p:txBody>
       </p:sp>
@@ -3046,7 +3847,7 @@
         </p:nvSpPr>
         <p:spPr>
           <a:xfrm>
-            <a:off x="2140839" y="3383280"/>
+            <a:off x="2140839" y="2651760"/>
             <a:ext cx="7907274" cy="0"/>
           </a:xfrm>
           <a:prstGeom prst="line">
@@ -3069,7 +3870,7 @@
         </p:nvSpPr>
         <p:spPr>
           <a:xfrm>
-            <a:off x="1848231" y="3090672"/>
+            <a:off x="1848231" y="2359152"/>
             <a:ext cx="585216" cy="585216"/>
           </a:xfrm>
           <a:prstGeom prst="ellipse">
@@ -3110,7 +3911,7 @@
         </p:nvSpPr>
         <p:spPr>
           <a:xfrm>
-            <a:off x="914400" y="2331720"/>
+            <a:off x="914400" y="1691640"/>
             <a:ext cx="2452878" cy="548640"/>
           </a:xfrm>
           <a:prstGeom prst="rect">
@@ -3127,7 +3928,7 @@
               <a:buNone/>
             </a:pPr>
             <a:r>
-              <a:rPr lang="en-US" sz="2200" dirty="0">
+              <a:rPr lang="en-US" sz="2100" dirty="0">
                 <a:solidFill>
                   <a:srgbClr val="24313F"/>
                 </a:solidFill>
@@ -3137,7 +3938,7 @@
               </a:rPr>
               <a:t>Claim</a:t>
             </a:r>
-            <a:endParaRPr lang="en-US" sz="2200" dirty="0"/>
+            <a:endParaRPr lang="en-US" sz="2100" dirty="0"/>
           </a:p>
         </p:txBody>
       </p:sp>
@@ -3149,8 +3950,8 @@
         </p:nvSpPr>
         <p:spPr>
           <a:xfrm>
-            <a:off x="960120" y="3886200"/>
-            <a:ext cx="2361438" cy="914400"/>
+            <a:off x="960120" y="3108960"/>
+            <a:ext cx="2361438" cy="685800"/>
           </a:xfrm>
           <a:prstGeom prst="rect">
             <a:avLst/>
@@ -3164,12 +3965,12 @@
           <a:p>
             <a:pPr algn="ctr" indent="0" marL="0">
               <a:lnSpc>
-                <a:spcPts val="1900"/>
+                <a:spcPts val="1700"/>
               </a:lnSpc>
               <a:buNone/>
             </a:pPr>
             <a:r>
-              <a:rPr lang="en-US" sz="1450" dirty="0">
+              <a:rPr lang="en-US" sz="1350" dirty="0">
                 <a:solidFill>
                   <a:srgbClr val="24313F"/>
                 </a:solidFill>
@@ -3179,7 +3980,7 @@
               </a:rPr>
               <a:t>the position you will defend</a:t>
             </a:r>
-            <a:endParaRPr lang="en-US" sz="1450" dirty="0"/>
+            <a:endParaRPr lang="en-US" sz="1350" dirty="0"/>
           </a:p>
         </p:txBody>
       </p:sp>
@@ -3191,7 +3992,7 @@
         </p:nvSpPr>
         <p:spPr>
           <a:xfrm>
-            <a:off x="4483989" y="3090672"/>
+            <a:off x="4483989" y="2359152"/>
             <a:ext cx="585216" cy="585216"/>
           </a:xfrm>
           <a:prstGeom prst="ellipse">
@@ -3232,7 +4033,7 @@
         </p:nvSpPr>
         <p:spPr>
           <a:xfrm>
-            <a:off x="3550158" y="2331720"/>
+            <a:off x="3550158" y="1691640"/>
             <a:ext cx="2452878" cy="548640"/>
           </a:xfrm>
           <a:prstGeom prst="rect">
@@ -3249,7 +4050,7 @@
               <a:buNone/>
             </a:pPr>
             <a:r>
-              <a:rPr lang="en-US" sz="2200" dirty="0">
+              <a:rPr lang="en-US" sz="2100" dirty="0">
                 <a:solidFill>
                   <a:srgbClr val="24313F"/>
                 </a:solidFill>
@@ -3259,7 +4060,7 @@
               </a:rPr>
               <a:t>Evidence</a:t>
             </a:r>
-            <a:endParaRPr lang="en-US" sz="2200" dirty="0"/>
+            <a:endParaRPr lang="en-US" sz="2100" dirty="0"/>
           </a:p>
         </p:txBody>
       </p:sp>
@@ -3271,8 +4072,8 @@
         </p:nvSpPr>
         <p:spPr>
           <a:xfrm>
-            <a:off x="3595878" y="3886200"/>
-            <a:ext cx="2361438" cy="914400"/>
+            <a:off x="3595878" y="3108960"/>
+            <a:ext cx="2361438" cy="685800"/>
           </a:xfrm>
           <a:prstGeom prst="rect">
             <a:avLst/>
@@ -3286,12 +4087,12 @@
           <a:p>
             <a:pPr algn="ctr" indent="0" marL="0">
               <a:lnSpc>
-                <a:spcPts val="1900"/>
+                <a:spcPts val="1700"/>
               </a:lnSpc>
               <a:buNone/>
             </a:pPr>
             <a:r>
-              <a:rPr lang="en-US" sz="1450" dirty="0">
+              <a:rPr lang="en-US" sz="1350" dirty="0">
                 <a:solidFill>
                   <a:srgbClr val="24313F"/>
                 </a:solidFill>
@@ -3301,7 +4102,7 @@
               </a:rPr>
               <a:t>case-study facts that back it</a:t>
             </a:r>
-            <a:endParaRPr lang="en-US" sz="1450" dirty="0"/>
+            <a:endParaRPr lang="en-US" sz="1350" dirty="0"/>
           </a:p>
         </p:txBody>
       </p:sp>
@@ -3313,7 +4114,7 @@
         </p:nvSpPr>
         <p:spPr>
           <a:xfrm>
-            <a:off x="7119747" y="3090672"/>
+            <a:off x="7119747" y="2359152"/>
             <a:ext cx="585216" cy="585216"/>
           </a:xfrm>
           <a:prstGeom prst="ellipse">
@@ -3354,7 +4155,7 @@
         </p:nvSpPr>
         <p:spPr>
           <a:xfrm>
-            <a:off x="6185916" y="2331720"/>
+            <a:off x="6185916" y="1691640"/>
             <a:ext cx="2452878" cy="548640"/>
           </a:xfrm>
           <a:prstGeom prst="rect">
@@ -3371,7 +4172,7 @@
               <a:buNone/>
             </a:pPr>
             <a:r>
-              <a:rPr lang="en-US" sz="2200" dirty="0">
+              <a:rPr lang="en-US" sz="2100" dirty="0">
                 <a:solidFill>
                   <a:srgbClr val="24313F"/>
                 </a:solidFill>
@@ -3381,7 +4182,7 @@
               </a:rPr>
               <a:t>Counter</a:t>
             </a:r>
-            <a:endParaRPr lang="en-US" sz="2200" dirty="0"/>
+            <a:endParaRPr lang="en-US" sz="2100" dirty="0"/>
           </a:p>
         </p:txBody>
       </p:sp>
@@ -3393,8 +4194,8 @@
         </p:nvSpPr>
         <p:spPr>
           <a:xfrm>
-            <a:off x="6231636" y="3886200"/>
-            <a:ext cx="2361438" cy="914400"/>
+            <a:off x="6231636" y="3108960"/>
+            <a:ext cx="2361438" cy="685800"/>
           </a:xfrm>
           <a:prstGeom prst="rect">
             <a:avLst/>
@@ -3408,12 +4209,12 @@
           <a:p>
             <a:pPr algn="ctr" indent="0" marL="0">
               <a:lnSpc>
-                <a:spcPts val="1900"/>
+                <a:spcPts val="1700"/>
               </a:lnSpc>
               <a:buNone/>
             </a:pPr>
             <a:r>
-              <a:rPr lang="en-US" sz="1450" dirty="0">
+              <a:rPr lang="en-US" sz="1350" dirty="0">
                 <a:solidFill>
                   <a:srgbClr val="24313F"/>
                 </a:solidFill>
@@ -3423,7 +4224,7 @@
               </a:rPr>
               <a:t>the strongest opposing case</a:t>
             </a:r>
-            <a:endParaRPr lang="en-US" sz="1450" dirty="0"/>
+            <a:endParaRPr lang="en-US" sz="1350" dirty="0"/>
           </a:p>
         </p:txBody>
       </p:sp>
@@ -3435,7 +4236,7 @@
         </p:nvSpPr>
         <p:spPr>
           <a:xfrm>
-            <a:off x="9755505" y="3090672"/>
+            <a:off x="9755505" y="2359152"/>
             <a:ext cx="585216" cy="585216"/>
           </a:xfrm>
           <a:prstGeom prst="ellipse">
@@ -3476,7 +4277,7 @@
         </p:nvSpPr>
         <p:spPr>
           <a:xfrm>
-            <a:off x="8821674" y="2331720"/>
+            <a:off x="8821674" y="1691640"/>
             <a:ext cx="2452878" cy="548640"/>
           </a:xfrm>
           <a:prstGeom prst="rect">
@@ -3493,7 +4294,7 @@
               <a:buNone/>
             </a:pPr>
             <a:r>
-              <a:rPr lang="en-US" sz="2200" dirty="0">
+              <a:rPr lang="en-US" sz="2100" dirty="0">
                 <a:solidFill>
                   <a:srgbClr val="24313F"/>
                 </a:solidFill>
@@ -3503,7 +4304,7 @@
               </a:rPr>
               <a:t>Response</a:t>
             </a:r>
-            <a:endParaRPr lang="en-US" sz="2200" dirty="0"/>
+            <a:endParaRPr lang="en-US" sz="2100" dirty="0"/>
           </a:p>
         </p:txBody>
       </p:sp>
@@ -3515,8 +4316,8 @@
         </p:nvSpPr>
         <p:spPr>
           <a:xfrm>
-            <a:off x="8867394" y="3886200"/>
-            <a:ext cx="2361438" cy="914400"/>
+            <a:off x="8867394" y="3108960"/>
+            <a:ext cx="2361438" cy="685800"/>
           </a:xfrm>
           <a:prstGeom prst="rect">
             <a:avLst/>
@@ -3530,12 +4331,12 @@
           <a:p>
             <a:pPr algn="ctr" indent="0" marL="0">
               <a:lnSpc>
-                <a:spcPts val="1900"/>
+                <a:spcPts val="1700"/>
               </a:lnSpc>
               <a:buNone/>
             </a:pPr>
             <a:r>
-              <a:rPr lang="en-US" sz="1450" dirty="0">
+              <a:rPr lang="en-US" sz="1350" dirty="0">
                 <a:solidFill>
                   <a:srgbClr val="24313F"/>
                 </a:solidFill>
@@ -3545,64 +4346,27 @@
               </a:rPr>
               <a:t>why your claim still stands</a:t>
             </a:r>
-            <a:endParaRPr lang="en-US" sz="1450" dirty="0"/>
-          </a:p>
-        </p:txBody>
-      </p:sp>
-      <p:sp>
-        <p:nvSpPr>
-          <p:cNvPr id="19" name="Text 17"/>
-          <p:cNvSpPr/>
-          <p:nvPr/>
-        </p:nvSpPr>
-        <p:spPr>
-          <a:xfrm>
-            <a:off x="822960" y="5212080"/>
-            <a:ext cx="10543032" cy="457200"/>
-          </a:xfrm>
-          <a:prstGeom prst="rect">
-            <a:avLst/>
-          </a:prstGeom>
-          <a:noFill/>
-          <a:ln/>
-        </p:spPr>
-        <p:txBody>
-          <a:bodyPr wrap="square" lIns="0" tIns="0" rIns="0" bIns="0" rtlCol="0" anchor="ctr"/>
-          <a:lstStyle/>
-          <a:p>
-            <a:pPr indent="0" marL="0">
-              <a:buNone/>
-            </a:pPr>
-            <a:r>
-              <a:rPr lang="en-US" sz="1250" i="1" dirty="0">
-                <a:solidFill>
-                  <a:srgbClr val="7A7F72"/>
-                </a:solidFill>
-                <a:latin typeface="Arial" pitchFamily="34" charset="0"/>
-                <a:ea typeface="Arial" pitchFamily="34" charset="-122"/>
-                <a:cs typeface="Arial" pitchFamily="34" charset="-120"/>
-              </a:rPr>
-              <a:t>Argue it aloud in trios, one countering from the same case study; the talk is the drafting. Plans that survived a counter do not go stale.</a:t>
-            </a:r>
-            <a:endParaRPr lang="en-US" sz="1250" dirty="0"/>
-          </a:p>
-        </p:txBody>
-      </p:sp>
-      <p:sp>
-        <p:nvSpPr>
-          <p:cNvPr id="20" name="Shape 18"/>
-          <p:cNvSpPr/>
-          <p:nvPr/>
-        </p:nvSpPr>
-        <p:spPr>
-          <a:xfrm>
-            <a:off x="822960" y="6382512"/>
-            <a:ext cx="10543032" cy="0"/>
-          </a:xfrm>
-          <a:prstGeom prst="line">
-            <a:avLst/>
-          </a:prstGeom>
-          <a:noFill/>
+            <a:endParaRPr lang="en-US" sz="1350" dirty="0"/>
+          </a:p>
+        </p:txBody>
+      </p:sp>
+      <p:sp>
+        <p:nvSpPr>
+          <p:cNvPr id="19" name="Shape 17"/>
+          <p:cNvSpPr/>
+          <p:nvPr/>
+        </p:nvSpPr>
+        <p:spPr>
+          <a:xfrm>
+            <a:off x="822960" y="3977640"/>
+            <a:ext cx="10543032" cy="1920240"/>
+          </a:xfrm>
+          <a:prstGeom prst="rect">
+            <a:avLst/>
+          </a:prstGeom>
+          <a:solidFill>
+            <a:srgbClr val="FAF8F1"/>
+          </a:solidFill>
           <a:ln w="9525">
             <a:solidFill>
               <a:srgbClr val="D9D4C4"/>
@@ -3611,32 +4375,56 @@
           </a:ln>
         </p:spPr>
       </p:sp>
-      <p:sp>
-        <p:nvSpPr>
-          <p:cNvPr id="21" name="Text 19"/>
-          <p:cNvSpPr/>
-          <p:nvPr/>
-        </p:nvSpPr>
-        <p:spPr>
-          <a:xfrm>
-            <a:off x="822960" y="6419088"/>
-            <a:ext cx="7315200" cy="274320"/>
-          </a:xfrm>
-          <a:prstGeom prst="rect">
-            <a:avLst/>
-          </a:prstGeom>
-          <a:noFill/>
-          <a:ln/>
-        </p:spPr>
-        <p:txBody>
-          <a:bodyPr wrap="square" lIns="0" tIns="0" rIns="0" bIns="0" rtlCol="0" anchor="ctr"/>
-          <a:lstStyle/>
-          <a:p>
-            <a:pPr indent="0" marL="0">
-              <a:buNone/>
-            </a:pPr>
-            <a:r>
-              <a:rPr lang="en-US" sz="900" spc="150" kern="0" dirty="0">
+      <p:pic>
+        <p:nvPicPr>
+          <p:cNvPr id="20" name="Image 0" descr="/Users/dogan/Documents/Vaults/Courses/wiki/classes/media-studies/decks/_build/img/qp21-sectionb.jpg">    </p:cNvPr>
+          <p:cNvPicPr>
+            <a:picLocks noChangeAspect="1"/>
+          </p:cNvPicPr>
+          <p:nvPr/>
+        </p:nvPicPr>
+        <p:blipFill>
+          <a:blip r:embed="rId1"/>
+          <a:stretch>
+            <a:fillRect/>
+          </a:stretch>
+        </p:blipFill>
+        <p:spPr>
+          <a:xfrm>
+            <a:off x="3980090" y="4105656"/>
+            <a:ext cx="4228773" cy="1664208"/>
+          </a:xfrm>
+          <a:prstGeom prst="rect">
+            <a:avLst/>
+          </a:prstGeom>
+        </p:spPr>
+      </p:pic>
+      <p:sp>
+        <p:nvSpPr>
+          <p:cNvPr id="21" name="Text 18"/>
+          <p:cNvSpPr/>
+          <p:nvPr/>
+        </p:nvSpPr>
+        <p:spPr>
+          <a:xfrm>
+            <a:off x="822960" y="5943600"/>
+            <a:ext cx="10543032" cy="320040"/>
+          </a:xfrm>
+          <a:prstGeom prst="rect">
+            <a:avLst/>
+          </a:prstGeom>
+          <a:noFill/>
+          <a:ln/>
+        </p:spPr>
+        <p:txBody>
+          <a:bodyPr wrap="square" lIns="0" tIns="0" rIns="0" bIns="0" rtlCol="0" anchor="ctr"/>
+          <a:lstStyle/>
+          <a:p>
+            <a:pPr algn="ctr" indent="0" marL="0">
+              <a:buNone/>
+            </a:pPr>
+            <a:r>
+              <a:rPr lang="en-US" sz="1050" dirty="0">
                 <a:solidFill>
                   <a:srgbClr val="7A7F72"/>
                 </a:solidFill>
@@ -3644,6 +4432,68 @@
                 <a:ea typeface="Arial" pitchFamily="34" charset="-122"/>
                 <a:cs typeface="Arial" pitchFamily="34" charset="-120"/>
               </a:rPr>
+              <a:t>The authentic register: June 2024 Paper 2, Section B. The trio questions imitate exactly this.</a:t>
+            </a:r>
+            <a:endParaRPr lang="en-US" sz="1050" dirty="0"/>
+          </a:p>
+        </p:txBody>
+      </p:sp>
+      <p:sp>
+        <p:nvSpPr>
+          <p:cNvPr id="22" name="Shape 19"/>
+          <p:cNvSpPr/>
+          <p:nvPr/>
+        </p:nvSpPr>
+        <p:spPr>
+          <a:xfrm>
+            <a:off x="822960" y="6382512"/>
+            <a:ext cx="10543032" cy="0"/>
+          </a:xfrm>
+          <a:prstGeom prst="line">
+            <a:avLst/>
+          </a:prstGeom>
+          <a:noFill/>
+          <a:ln w="9525">
+            <a:solidFill>
+              <a:srgbClr val="D9D4C4"/>
+            </a:solidFill>
+            <a:prstDash val="solid"/>
+          </a:ln>
+        </p:spPr>
+      </p:sp>
+      <p:sp>
+        <p:nvSpPr>
+          <p:cNvPr id="23" name="Text 20"/>
+          <p:cNvSpPr/>
+          <p:nvPr/>
+        </p:nvSpPr>
+        <p:spPr>
+          <a:xfrm>
+            <a:off x="822960" y="6419088"/>
+            <a:ext cx="7315200" cy="274320"/>
+          </a:xfrm>
+          <a:prstGeom prst="rect">
+            <a:avLst/>
+          </a:prstGeom>
+          <a:noFill/>
+          <a:ln/>
+        </p:spPr>
+        <p:txBody>
+          <a:bodyPr wrap="square" lIns="0" tIns="0" rIns="0" bIns="0" rtlCol="0" anchor="ctr"/>
+          <a:lstStyle/>
+          <a:p>
+            <a:pPr indent="0" marL="0">
+              <a:buNone/>
+            </a:pPr>
+            <a:r>
+              <a:rPr lang="en-US" sz="900" spc="150" kern="0" dirty="0">
+                <a:solidFill>
+                  <a:srgbClr val="7A7F72"/>
+                </a:solidFill>
+                <a:latin typeface="Arial" pitchFamily="34" charset="0"/>
+                <a:ea typeface="Arial" pitchFamily="34" charset="-122"/>
+                <a:cs typeface="Arial" pitchFamily="34" charset="-120"/>
+              </a:rPr>
               <a:t>MEDIA STUDIES 9607 · SEMESTER I</a:t>
             </a:r>
             <a:endParaRPr lang="en-US" sz="900" dirty="0"/>
@@ -3652,7 +4502,7 @@
       </p:sp>
       <p:sp>
         <p:nvSpPr>
-          <p:cNvPr id="22" name="Text 20"/>
+          <p:cNvPr id="24" name="Text 21"/>
           <p:cNvSpPr/>
           <p:nvPr/>
         </p:nvSpPr>
@@ -3875,13 +4725,6 @@
 <file path=ppt/slides/slide6.xml><?xml version="1.0" encoding="utf-8"?>
 <p:sld xmlns:a="http://schemas.openxmlformats.org/drawingml/2006/main" xmlns:r="http://schemas.openxmlformats.org/officeDocument/2006/relationships" xmlns:p="http://schemas.openxmlformats.org/presentationml/2006/main">
   <p:cSld name="Slide 6">
-    <p:bg>
-      <p:bgPr>
-        <a:solidFill>
-          <a:srgbClr val="FAF8F1"/>
-        </a:solidFill>
-      </p:bgPr>
-    </p:bg>
     <p:spTree>
       <p:nvGrpSpPr>
         <p:cNvPr id="1" name=""/>
@@ -3898,7 +4741,7 @@
       </p:grpSpPr>
       <p:pic>
         <p:nvPicPr>
-          <p:cNvPr id="2" name="Image 0" descr="/Users/dogan/Documents/Vaults/Courses/wiki/classes/media-studies/decks/_build/img/crops/loewy-moon_a637.jpg">    </p:cNvPr>
+          <p:cNvPr id="2" name="Image 0" descr="/Users/dogan/Documents/Vaults/Courses/wiki/classes/media-studies/decks/_build/img/crops/loewy-moon_a1777.jpg">    </p:cNvPr>
           <p:cNvPicPr>
             <a:picLocks noChangeAspect="1"/>
           </p:cNvPicPr>
@@ -3912,8 +4755,8 @@
         </p:blipFill>
         <p:spPr>
           <a:xfrm>
-            <a:off x="7818120" y="0"/>
-            <a:ext cx="4370832" cy="6858000"/>
+            <a:off x="0" y="0"/>
+            <a:ext cx="12188952" cy="6858000"/>
           </a:xfrm>
           <a:prstGeom prst="rect">
             <a:avLst/>
@@ -3922,14 +4765,14 @@
       </p:pic>
       <p:sp>
         <p:nvSpPr>
-          <p:cNvPr id="3" name="Text 0"/>
-          <p:cNvSpPr/>
-          <p:nvPr/>
-        </p:nvSpPr>
-        <p:spPr>
-          <a:xfrm>
-            <a:off x="8001000" y="6126480"/>
-            <a:ext cx="4005072" cy="365760"/>
+          <p:cNvPr id="3" name="Shape 0"/>
+          <p:cNvSpPr/>
+          <p:nvPr/>
+        </p:nvSpPr>
+        <p:spPr>
+          <a:xfrm>
+            <a:off x="502920" y="502920"/>
+            <a:ext cx="5120640" cy="502920"/>
           </a:xfrm>
           <a:prstGeom prst="rect">
             <a:avLst/>
@@ -3939,191 +4782,167 @@
           </a:solidFill>
           <a:ln/>
         </p:spPr>
-        <p:txBody>
-          <a:bodyPr wrap="square" lIns="0" tIns="0" rIns="0" bIns="0" rtlCol="0" anchor="ctr"/>
-          <a:lstStyle/>
-          <a:p>
-            <a:pPr indent="0" marL="0">
-              <a:buNone/>
-            </a:pPr>
-            <a:r>
-              <a:rPr lang="en-US" sz="950" spc="50" kern="0" dirty="0">
-                <a:solidFill>
-                  <a:srgbClr val="7A7F72"/>
+      </p:sp>
+      <p:sp>
+        <p:nvSpPr>
+          <p:cNvPr id="4" name="Text 1"/>
+          <p:cNvSpPr/>
+          <p:nvPr/>
+        </p:nvSpPr>
+        <p:spPr>
+          <a:xfrm>
+            <a:off x="704088" y="521208"/>
+            <a:ext cx="4846320" cy="274320"/>
+          </a:xfrm>
+          <a:prstGeom prst="rect">
+            <a:avLst/>
+          </a:prstGeom>
+          <a:noFill/>
+          <a:ln/>
+        </p:spPr>
+        <p:txBody>
+          <a:bodyPr wrap="square" lIns="0" tIns="0" rIns="0" bIns="0" rtlCol="0" anchor="ctr"/>
+          <a:lstStyle/>
+          <a:p>
+            <a:pPr algn="l" indent="0" marL="0">
+              <a:buNone/>
+            </a:pPr>
+            <a:r>
+              <a:rPr lang="en-US" sz="1100" b="1" spc="250" kern="0" dirty="0">
+                <a:solidFill>
+                  <a:srgbClr val="4A6B5D"/>
                 </a:solidFill>
                 <a:latin typeface="Arial" pitchFamily="34" charset="0"/>
                 <a:ea typeface="Arial" pitchFamily="34" charset="-122"/>
                 <a:cs typeface="Arial" pitchFamily="34" charset="-120"/>
               </a:rPr>
-              <a:t>Loewy and Puiseux, from the Atlas Photographique de la Lune, c. 1900</a:t>
-            </a:r>
-            <a:endParaRPr lang="en-US" sz="950" dirty="0"/>
-          </a:p>
-        </p:txBody>
-      </p:sp>
-      <p:sp>
-        <p:nvSpPr>
-          <p:cNvPr id="4" name="Text 1"/>
-          <p:cNvSpPr/>
-          <p:nvPr/>
-        </p:nvSpPr>
-        <p:spPr>
-          <a:xfrm>
-            <a:off x="822960" y="685800"/>
-            <a:ext cx="5486400" cy="274320"/>
-          </a:xfrm>
-          <a:prstGeom prst="rect">
-            <a:avLst/>
-          </a:prstGeom>
-          <a:noFill/>
-          <a:ln/>
-        </p:spPr>
-        <p:txBody>
-          <a:bodyPr wrap="square" lIns="0" tIns="0" rIns="0" bIns="0" rtlCol="0" anchor="ctr"/>
-          <a:lstStyle/>
-          <a:p>
-            <a:pPr algn="l" indent="0" marL="0">
-              <a:buNone/>
-            </a:pPr>
-            <a:r>
-              <a:rPr lang="en-US" sz="1100" b="1" spc="250" kern="0" dirty="0">
-                <a:solidFill>
-                  <a:srgbClr val="4A6B5D"/>
+              <a:t>PLATE BY PLATE</a:t>
+            </a:r>
+            <a:endParaRPr lang="en-US" sz="1100" dirty="0"/>
+          </a:p>
+        </p:txBody>
+      </p:sp>
+      <p:sp>
+        <p:nvSpPr>
+          <p:cNvPr id="5" name="Shape 2"/>
+          <p:cNvSpPr/>
+          <p:nvPr/>
+        </p:nvSpPr>
+        <p:spPr>
+          <a:xfrm>
+            <a:off x="457200" y="5230368"/>
+            <a:ext cx="8778240" cy="1243584"/>
+          </a:xfrm>
+          <a:prstGeom prst="rect">
+            <a:avLst/>
+          </a:prstGeom>
+          <a:solidFill>
+            <a:srgbClr val="FAF8F1"/>
+          </a:solidFill>
+          <a:ln/>
+        </p:spPr>
+      </p:sp>
+      <p:sp>
+        <p:nvSpPr>
+          <p:cNvPr id="6" name="Shape 3"/>
+          <p:cNvSpPr/>
+          <p:nvPr/>
+        </p:nvSpPr>
+        <p:spPr>
+          <a:xfrm>
+            <a:off x="676656" y="5468112"/>
+            <a:ext cx="731520" cy="0"/>
+          </a:xfrm>
+          <a:prstGeom prst="line">
+            <a:avLst/>
+          </a:prstGeom>
+          <a:noFill/>
+          <a:ln w="28575">
+            <a:solidFill>
+              <a:srgbClr val="8C3A38"/>
+            </a:solidFill>
+            <a:prstDash val="solid"/>
+          </a:ln>
+        </p:spPr>
+      </p:sp>
+      <p:sp>
+        <p:nvSpPr>
+          <p:cNvPr id="7" name="Text 4"/>
+          <p:cNvSpPr/>
+          <p:nvPr/>
+        </p:nvSpPr>
+        <p:spPr>
+          <a:xfrm>
+            <a:off x="676656" y="5541264"/>
+            <a:ext cx="8339328" cy="585216"/>
+          </a:xfrm>
+          <a:prstGeom prst="rect">
+            <a:avLst/>
+          </a:prstGeom>
+          <a:noFill/>
+          <a:ln/>
+        </p:spPr>
+        <p:txBody>
+          <a:bodyPr wrap="square" lIns="0" tIns="0" rIns="0" bIns="0" rtlCol="0" anchor="t"/>
+          <a:lstStyle/>
+          <a:p>
+            <a:pPr indent="0" marL="0">
+              <a:lnSpc>
+                <a:spcPts val="2200"/>
+              </a:lnSpc>
+              <a:buNone/>
+            </a:pPr>
+            <a:r>
+              <a:rPr lang="en-US" sz="1800" dirty="0">
+                <a:solidFill>
+                  <a:srgbClr val="24313F"/>
+                </a:solidFill>
+                <a:latin typeface="Georgia" pitchFamily="34" charset="0"/>
+                <a:ea typeface="Georgia" pitchFamily="34" charset="-122"/>
+                <a:cs typeface="Georgia" pitchFamily="34" charset="-120"/>
+              </a:rPr>
+              <a:t>Two astronomers photographed the entire moon, plate by plate, so no region went unexamined. The week runs on that standard.</a:t>
+            </a:r>
+            <a:endParaRPr lang="en-US" sz="1800" dirty="0"/>
+          </a:p>
+        </p:txBody>
+      </p:sp>
+      <p:sp>
+        <p:nvSpPr>
+          <p:cNvPr id="8" name="Text 5"/>
+          <p:cNvSpPr/>
+          <p:nvPr/>
+        </p:nvSpPr>
+        <p:spPr>
+          <a:xfrm>
+            <a:off x="676656" y="6181344"/>
+            <a:ext cx="8339328" cy="256032"/>
+          </a:xfrm>
+          <a:prstGeom prst="rect">
+            <a:avLst/>
+          </a:prstGeom>
+          <a:noFill/>
+          <a:ln/>
+        </p:spPr>
+        <p:txBody>
+          <a:bodyPr wrap="square" lIns="0" tIns="0" rIns="0" bIns="0" rtlCol="0" anchor="ctr"/>
+          <a:lstStyle/>
+          <a:p>
+            <a:pPr indent="0" marL="0">
+              <a:buNone/>
+            </a:pPr>
+            <a:r>
+              <a:rPr lang="en-US" sz="950" spc="50" kern="0" dirty="0">
+                <a:solidFill>
+                  <a:srgbClr val="7A7F72"/>
                 </a:solidFill>
                 <a:latin typeface="Arial" pitchFamily="34" charset="0"/>
                 <a:ea typeface="Arial" pitchFamily="34" charset="-122"/>
                 <a:cs typeface="Arial" pitchFamily="34" charset="-120"/>
               </a:rPr>
-              <a:t>PLATE BY PLATE</a:t>
-            </a:r>
-            <a:endParaRPr lang="en-US" sz="1100" dirty="0"/>
-          </a:p>
-        </p:txBody>
-      </p:sp>
-      <p:sp>
-        <p:nvSpPr>
-          <p:cNvPr id="5" name="Shape 2"/>
-          <p:cNvSpPr/>
-          <p:nvPr/>
-        </p:nvSpPr>
-        <p:spPr>
-          <a:xfrm>
-            <a:off x="822960" y="1051560"/>
-            <a:ext cx="6675120" cy="0"/>
-          </a:xfrm>
-          <a:prstGeom prst="line">
-            <a:avLst/>
-          </a:prstGeom>
-          <a:noFill/>
-          <a:ln w="9525">
-            <a:solidFill>
-              <a:srgbClr val="D9D4C4"/>
-            </a:solidFill>
-            <a:prstDash val="solid"/>
-          </a:ln>
-        </p:spPr>
-      </p:sp>
-      <p:sp>
-        <p:nvSpPr>
-          <p:cNvPr id="6" name="Text 3"/>
-          <p:cNvSpPr/>
-          <p:nvPr/>
-        </p:nvSpPr>
-        <p:spPr>
-          <a:xfrm>
-            <a:off x="822960" y="1234440"/>
-            <a:ext cx="6766560" cy="1371600"/>
-          </a:xfrm>
-          <a:prstGeom prst="rect">
-            <a:avLst/>
-          </a:prstGeom>
-          <a:noFill/>
-          <a:ln/>
-        </p:spPr>
-        <p:txBody>
-          <a:bodyPr wrap="square" lIns="0" tIns="0" rIns="0" bIns="0" rtlCol="0" anchor="t"/>
-          <a:lstStyle/>
-          <a:p>
-            <a:pPr indent="0" marL="0">
-              <a:lnSpc>
-                <a:spcPts val="4200"/>
-              </a:lnSpc>
-              <a:buNone/>
-            </a:pPr>
-            <a:r>
-              <a:rPr lang="en-US" sz="4000" dirty="0">
-                <a:solidFill>
-                  <a:srgbClr val="24313F"/>
-                </a:solidFill>
-                <a:latin typeface="Georgia" pitchFamily="34" charset="0"/>
-                <a:ea typeface="Georgia" pitchFamily="34" charset="-122"/>
-                <a:cs typeface="Georgia" pitchFamily="34" charset="-120"/>
-              </a:rPr>
-              <a:t>Photograph</a:t>
-            </a:r>
-            <a:endParaRPr lang="en-US" sz="4000" dirty="0"/>
-          </a:p>
-          <a:p>
-            <a:pPr indent="0" marL="0">
-              <a:lnSpc>
-                <a:spcPts val="4200"/>
-              </a:lnSpc>
-              <a:buNone/>
-            </a:pPr>
-            <a:r>
-              <a:rPr lang="en-US" sz="4000" dirty="0">
-                <a:solidFill>
-                  <a:srgbClr val="24313F"/>
-                </a:solidFill>
-                <a:latin typeface="Georgia" pitchFamily="34" charset="0"/>
-                <a:ea typeface="Georgia" pitchFamily="34" charset="-122"/>
-                <a:cs typeface="Georgia" pitchFamily="34" charset="-120"/>
-              </a:rPr>
-              <a:t>the whole moon</a:t>
-            </a:r>
-            <a:endParaRPr lang="en-US" sz="4000" dirty="0"/>
-          </a:p>
-        </p:txBody>
-      </p:sp>
-      <p:sp>
-        <p:nvSpPr>
-          <p:cNvPr id="7" name="Text 4"/>
-          <p:cNvSpPr/>
-          <p:nvPr/>
-        </p:nvSpPr>
-        <p:spPr>
-          <a:xfrm>
-            <a:off x="822960" y="2743200"/>
-            <a:ext cx="6858000" cy="2743200"/>
-          </a:xfrm>
-          <a:prstGeom prst="rect">
-            <a:avLst/>
-          </a:prstGeom>
-          <a:noFill/>
-          <a:ln/>
-        </p:spPr>
-        <p:txBody>
-          <a:bodyPr wrap="square" lIns="0" tIns="0" rIns="0" bIns="0" rtlCol="0" anchor="t"/>
-          <a:lstStyle/>
-          <a:p>
-            <a:pPr indent="0" marL="0">
-              <a:lnSpc>
-                <a:spcPts val="2600"/>
-              </a:lnSpc>
-              <a:buNone/>
-            </a:pPr>
-            <a:r>
-              <a:rPr lang="en-US" sz="1800" dirty="0">
-                <a:solidFill>
-                  <a:srgbClr val="24313F"/>
-                </a:solidFill>
-                <a:latin typeface="Georgia" pitchFamily="34" charset="0"/>
-                <a:ea typeface="Georgia" pitchFamily="34" charset="-122"/>
-                <a:cs typeface="Georgia" pitchFamily="34" charset="-120"/>
-              </a:rPr>
-              <a:t>Two astronomers spent years photographing the entire moon, plate by plate, so that no region went unexamined. That is the standard this week. Every cell of the matrix gets looked at honestly, including the empty ones. Revisiting the topic you already like proves nothing.</a:t>
-            </a:r>
-            <a:endParaRPr lang="en-US" sz="1800" dirty="0"/>
+              <a:t>Loewy and Puiseux, Atlas Photographique de la Lune, c. 1900</a:t>
+            </a:r>
+            <a:endParaRPr lang="en-US" sz="950" dirty="0"/>
           </a:p>
         </p:txBody>
       </p:sp>
@@ -5376,7 +6195,7 @@
                 <a:ea typeface="Arial" pitchFamily="34" charset="-122"/>
                 <a:cs typeface="Arial" pitchFamily="34" charset="-120"/>
               </a:rPr>
-              <a:t>Run as consolidation Jeopardy: teams claim a cell by producing the evidence, the room verifies: evidenced, thin, or empty. An honest empty scores too; the game rewards the audit, not the bluff.</a:t>
+              <a:t>Example rows; yours are the room's case studies. Run as consolidation Jeopardy: teams claim a cell by producing the evidence, the room verifies: evidenced, thin, or empty. An honest empty scores too; the game rewards the audit, not the bluff.</a:t>
             </a:r>
             <a:endParaRPr lang="en-US" sz="1200" dirty="0"/>
           </a:p>
@@ -5523,34 +6342,34 @@
         </p:nvSpPr>
         <p:spPr>
           <a:xfrm>
-            <a:off x="502920" y="548640"/>
-            <a:ext cx="1828800" cy="1828800"/>
-          </a:xfrm>
-          <a:prstGeom prst="rect">
-            <a:avLst/>
-          </a:prstGeom>
-          <a:noFill/>
-          <a:ln/>
-        </p:spPr>
-        <p:txBody>
-          <a:bodyPr wrap="square" lIns="0" tIns="0" rIns="0" bIns="0" rtlCol="0" anchor="t"/>
-          <a:lstStyle/>
-          <a:p>
-            <a:pPr indent="0" marL="0">
-              <a:buNone/>
-            </a:pPr>
-            <a:r>
-              <a:rPr lang="en-US" sz="20000" dirty="0">
-                <a:solidFill>
-                  <a:srgbClr val="A3C1AD"/>
-                </a:solidFill>
-                <a:latin typeface="Georgia" pitchFamily="34" charset="0"/>
-                <a:ea typeface="Georgia" pitchFamily="34" charset="-122"/>
-                <a:cs typeface="Georgia" pitchFamily="34" charset="-120"/>
-              </a:rPr>
-              <a:t>“</a:t>
-            </a:r>
-            <a:endParaRPr lang="en-US" sz="20000" dirty="0"/>
+            <a:off x="822960" y="1554480"/>
+            <a:ext cx="7315200" cy="274320"/>
+          </a:xfrm>
+          <a:prstGeom prst="rect">
+            <a:avLst/>
+          </a:prstGeom>
+          <a:noFill/>
+          <a:ln/>
+        </p:spPr>
+        <p:txBody>
+          <a:bodyPr wrap="square" lIns="0" tIns="0" rIns="0" bIns="0" rtlCol="0" anchor="ctr"/>
+          <a:lstStyle/>
+          <a:p>
+            <a:pPr algn="l" indent="0" marL="0">
+              <a:buNone/>
+            </a:pPr>
+            <a:r>
+              <a:rPr lang="en-US" sz="1100" b="1" spc="250" kern="0" dirty="0">
+                <a:solidFill>
+                  <a:srgbClr val="4A6B5D"/>
+                </a:solidFill>
+                <a:latin typeface="Arial" pitchFamily="34" charset="0"/>
+                <a:ea typeface="Arial" pitchFamily="34" charset="-122"/>
+                <a:cs typeface="Arial" pitchFamily="34" charset="-120"/>
+              </a:rPr>
+              <a:t>THE DELIVERABLE OF THE WEEK</a:t>
+            </a:r>
+            <a:endParaRPr lang="en-US" sz="1100" dirty="0"/>
           </a:p>
         </p:txBody>
       </p:sp>
@@ -5562,7 +6381,7 @@
         </p:nvSpPr>
         <p:spPr>
           <a:xfrm>
-            <a:off x="822960" y="1920240"/>
+            <a:off x="822960" y="2103120"/>
             <a:ext cx="10424160" cy="2194560"/>
           </a:xfrm>
           <a:prstGeom prst="rect">
@@ -6107,7 +6926,7 @@
                 <a:ea typeface="Georgia" pitchFamily="34" charset="-122"/>
                 <a:cs typeface="Georgia" pitchFamily="34" charset="-120"/>
               </a:rPr>
-              <a:t>The full two-hour Component 2. Today is the last session that clears the 14-day notice; the format is A4's plus Section B, nothing new.</a:t>
+              <a:t>The full two-hour Component 2. Today is the last teaching session that clears the notice window; the format is A4's plus Section B, nothing new.</a:t>
             </a:r>
             <a:endParaRPr lang="en-US" sz="1700" dirty="0"/>
           </a:p>

--- a/content/decks/media-studies/media-studies-s1-lesson-17-consolidation-and-the-coverage-matrix.pptx
+++ b/content/decks/media-studies/media-studies-s1-lesson-17-consolidation-and-the-coverage-matrix.pptx
@@ -3072,7 +3072,7 @@
                 <a:ea typeface="Georgia" pitchFamily="34" charset="-122"/>
                 <a:cs typeface="Georgia" pitchFamily="34" charset="-120"/>
               </a:rPr>
-              <a:t>No region</a:t>
+              <a:t>Every cell checked.</a:t>
             </a:r>
             <a:endParaRPr lang="en-US" sz="5000" dirty="0"/>
           </a:p>
@@ -3092,7 +3092,7 @@
                 <a:ea typeface="Georgia" pitchFamily="34" charset="-122"/>
                 <a:cs typeface="Georgia" pitchFamily="34" charset="-120"/>
               </a:rPr>
-              <a:t>goes unexamined.</a:t>
+              <a:t>No gaps left.</a:t>
             </a:r>
             <a:endParaRPr lang="en-US" sz="5000" dirty="0"/>
           </a:p>
@@ -3472,7 +3472,7 @@
                 <a:ea typeface="Georgia" pitchFamily="34" charset="-122"/>
                 <a:cs typeface="Georgia" pitchFamily="34" charset="-120"/>
               </a:rPr>
-              <a:t>Log one target from the AO splits, connected in writing to the L14 target. Two data points now: the Forecast Grade has evidence.</a:t>
+              <a:t>Write one new target from your AO scores, linked to your L14 target. Two data points now: your Forecast Grade has evidence.</a:t>
             </a:r>
             <a:endParaRPr lang="en-US" sz="1550" dirty="0"/>
           </a:p>
@@ -4714,6 +4714,65 @@
           </a:p>
         </p:txBody>
       </p:sp>
+      <p:sp>
+        <p:nvSpPr>
+          <p:cNvPr id="6" name="Text 4"/>
+          <p:cNvSpPr/>
+          <p:nvPr/>
+        </p:nvSpPr>
+        <p:spPr>
+          <a:xfrm>
+            <a:off x="822960" y="5806440"/>
+            <a:ext cx="10424160" cy="640080"/>
+          </a:xfrm>
+          <a:prstGeom prst="rect">
+            <a:avLst/>
+          </a:prstGeom>
+          <a:noFill/>
+          <a:ln/>
+        </p:spPr>
+        <p:txBody>
+          <a:bodyPr wrap="square" lIns="0" tIns="0" rIns="0" bIns="0" rtlCol="0" anchor="t"/>
+          <a:lstStyle/>
+          <a:p>
+            <a:pPr indent="0" marL="0">
+              <a:lnSpc>
+                <a:spcPts val="1900"/>
+              </a:lnSpc>
+              <a:buNone/>
+            </a:pPr>
+            <a:r>
+              <a:rPr lang="en-US" sz="1200" b="1" spc="100" kern="0" dirty="0">
+                <a:solidFill>
+                  <a:srgbClr val="7A7F72"/>
+                </a:solidFill>
+                <a:latin typeface="Arial" pitchFamily="34" charset="0"/>
+                <a:ea typeface="Arial" pitchFamily="34" charset="-122"/>
+                <a:cs typeface="Arial" pitchFamily="34" charset="-120"/>
+              </a:rPr>
+              <a:t>IN PLAIN WORDS   </a:t>
+            </a:r>
+            <a:pPr indent="0" marL="0">
+              <a:lnSpc>
+                <a:spcPts val="1900"/>
+              </a:lnSpc>
+              <a:buNone/>
+            </a:pPr>
+            <a:r>
+              <a:rPr lang="en-US" sz="1400" i="1" dirty="0">
+                <a:solidFill>
+                  <a:srgbClr val="4A6B5D"/>
+                </a:solidFill>
+                <a:latin typeface="Georgia" pitchFamily="34" charset="0"/>
+                <a:ea typeface="Georgia" pitchFamily="34" charset="-122"/>
+                <a:cs typeface="Georgia" pitchFamily="34" charset="-120"/>
+              </a:rPr>
+              <a:t>If you only know your own argument, you barely know it. Learn the counter-argument too.</a:t>
+            </a:r>
+            <a:endParaRPr lang="en-US" sz="1200" dirty="0"/>
+          </a:p>
+        </p:txBody>
+      </p:sp>
     </p:spTree>
   </p:cSld>
   <p:clrMapOvr>
@@ -6168,7 +6227,7 @@
         <p:spPr>
           <a:xfrm>
             <a:off x="822960" y="5029200"/>
-            <a:ext cx="10543032" cy="640080"/>
+            <a:ext cx="10543032" cy="548640"/>
           </a:xfrm>
           <a:prstGeom prst="rect">
             <a:avLst/>
@@ -6187,7 +6246,7 @@
               <a:buNone/>
             </a:pPr>
             <a:r>
-              <a:rPr lang="en-US" sz="1200" i="1" dirty="0">
+              <a:rPr lang="en-US" sz="1000" b="1" spc="100" kern="0" dirty="0">
                 <a:solidFill>
                   <a:srgbClr val="7A7F72"/>
                 </a:solidFill>
@@ -6195,9 +6254,63 @@
                 <a:ea typeface="Arial" pitchFamily="34" charset="-122"/>
                 <a:cs typeface="Arial" pitchFamily="34" charset="-120"/>
               </a:rPr>
-              <a:t>Example rows; yours are the room's case studies. Run as consolidation Jeopardy: teams claim a cell by producing the evidence, the room verifies: evidenced, thin, or empty. An honest empty scores too; the game rewards the audit, not the bluff.</a:t>
-            </a:r>
-            <a:endParaRPr lang="en-US" sz="1200" dirty="0"/>
+              <a:t>THE GAME   </a:t>
+            </a:r>
+            <a:pPr indent="0" marL="0">
+              <a:lnSpc>
+                <a:spcPts val="1600"/>
+              </a:lnSpc>
+              <a:buNone/>
+            </a:pPr>
+            <a:r>
+              <a:rPr lang="en-US" sz="1200" dirty="0">
+                <a:solidFill>
+                  <a:srgbClr val="7A7F72"/>
+                </a:solidFill>
+                <a:latin typeface="Georgia" pitchFamily="34" charset="0"/>
+                <a:ea typeface="Georgia" pitchFamily="34" charset="-122"/>
+                <a:cs typeface="Georgia" pitchFamily="34" charset="-120"/>
+              </a:rPr>
+              <a:t>Jeopardy: claim a cell by producing the evidence. The room verifies: evidenced, thin, or empty.</a:t>
+            </a:r>
+            <a:endParaRPr lang="en-US" sz="1000" dirty="0"/>
+          </a:p>
+          <a:p>
+            <a:pPr indent="0" marL="0">
+              <a:lnSpc>
+                <a:spcPts val="1600"/>
+              </a:lnSpc>
+              <a:buNone/>
+            </a:pPr>
+            <a:r>
+              <a:rPr lang="en-US" sz="1000" b="1" spc="100" kern="0" dirty="0">
+                <a:solidFill>
+                  <a:srgbClr val="7A7F72"/>
+                </a:solidFill>
+                <a:latin typeface="Arial" pitchFamily="34" charset="0"/>
+                <a:ea typeface="Arial" pitchFamily="34" charset="-122"/>
+                <a:cs typeface="Arial" pitchFamily="34" charset="-120"/>
+              </a:rPr>
+              <a:t>THE RULE   </a:t>
+            </a:r>
+            <a:pPr indent="0" marL="0">
+              <a:lnSpc>
+                <a:spcPts val="1600"/>
+              </a:lnSpc>
+              <a:buNone/>
+            </a:pPr>
+            <a:r>
+              <a:rPr lang="en-US" sz="1200" dirty="0">
+                <a:solidFill>
+                  <a:srgbClr val="7A7F72"/>
+                </a:solidFill>
+                <a:latin typeface="Georgia" pitchFamily="34" charset="0"/>
+                <a:ea typeface="Georgia" pitchFamily="34" charset="-122"/>
+                <a:cs typeface="Georgia" pitchFamily="34" charset="-120"/>
+              </a:rPr>
+              <a:t>An honest “empty” also scores. The game rewards the audit, not the bluff. These rows are examples; yours are the room's case studies.</a:t>
+            </a:r>
+            <a:endParaRPr lang="en-US" sz="1000" dirty="0"/>
           </a:p>
         </p:txBody>
       </p:sp>

--- a/content/decks/media-studies/media-studies-s1-lesson-17-consolidation-and-the-coverage-matrix.pptx
+++ b/content/decks/media-studies/media-studies-s1-lesson-17-consolidation-and-the-coverage-matrix.pptx
@@ -512,7 +512,7 @@
           <a:p>
             <a:r>
               <a:rPr lang="en-US" dirty="0"/>
-              <a:t>The semester's knowledge gets audited before the exam tests it. Every case study crossed against the four Key Concepts until the uncovered cell is found. Calendar note: Tue 12-22 is listed as End-of-Semester Activity on the school calendar and is unresolved; if it claims the day, D2's trios fold into Wednesday.</a:t>
+              <a:t>The semester's knowledge gets audited before the exam tests it. Every case study crossed against the four Key Concepts until the uncovered cell is found. Two days: Monday carries the A4 review and the argument trios (two rotations; the third went with the lost Tuesday), Wednesday the matrix and the break brief. Tue 12-22's End-of-Semester Activity no longer touches a Media day.</a:t>
             </a:r>
             <a:endParaRPr lang="en-US" dirty="0"/>
           </a:p>
@@ -2000,7 +2000,7 @@
                 <a:ea typeface="Arial" pitchFamily="34" charset="-122"/>
                 <a:cs typeface="Arial" pitchFamily="34" charset="-120"/>
               </a:rPr>
-              <a:t>Three days  ·  Monday 21 to Wednesday 23 December</a:t>
+              <a:t>Two days  ·  Monday 21 and Wednesday 23 December</a:t>
             </a:r>
             <a:endParaRPr lang="en-US" sz="1300" dirty="0"/>
           </a:p>
